--- a/mon/toan/slide/lop10/Slide_TOAN10_BaiTapCuoiChuong1_T9.pptx
+++ b/mon/toan/slide/lop10/Slide_TOAN10_BaiTapCuoiChuong1_T9.pptx
@@ -3343,7 +3343,7 @@
                 </a:solidFill>
                 <a:latin typeface="Calibri"/>
               </a:rPr>
-              <a:t>GV soạn: Trương Tử Trang – Trường THPT Vĩnh Thạnh</a:t>
+              <a:t>GV soạn: TTT – Trường THPT</a:t>
             </a:r>
           </a:p>
         </p:txBody>
@@ -8698,50 +8698,6 @@
       <p:grpSpPr/>
       <p:sp>
         <p:nvSpPr>
-          <p:cNvPr id="2" name="Rectangle 1"/>
-          <p:cNvSpPr/>
-          <p:nvPr/>
-        </p:nvSpPr>
-        <p:spPr>
-          <a:xfrm>
-            <a:off x="457200" y="384048"/>
-            <a:ext cx="109728" cy="658368"/>
-          </a:xfrm>
-          <a:prstGeom prst="rect">
-            <a:avLst/>
-          </a:prstGeom>
-          <a:solidFill>
-            <a:srgbClr val="1E40AF"/>
-          </a:solidFill>
-          <a:ln>
-            <a:noFill/>
-          </a:ln>
-          <a:effectLst/>
-        </p:spPr>
-        <p:style>
-          <a:lnRef idx="1">
-            <a:schemeClr val="accent1"/>
-          </a:lnRef>
-          <a:fillRef idx="3">
-            <a:schemeClr val="accent1"/>
-          </a:fillRef>
-          <a:effectRef idx="2">
-            <a:schemeClr val="accent1"/>
-          </a:effectRef>
-          <a:fontRef idx="minor">
-            <a:schemeClr val="lt1"/>
-          </a:fontRef>
-        </p:style>
-        <p:txBody>
-          <a:bodyPr rtlCol="0" anchor="ctr"/>
-          <a:lstStyle/>
-          <a:p>
-            <a:pPr algn="ctr"/>
-          </a:p>
-        </p:txBody>
-      </p:sp>
-      <p:sp>
-        <p:nvSpPr>
           <p:cNvPr id="3" name="TextBox 2"/>
           <p:cNvSpPr txBox="1"/>
           <p:nvPr/>
@@ -8853,30 +8809,1933 @@
           </a:p>
         </p:txBody>
       </p:sp>
-      <p:pic>
-        <p:nvPicPr>
-          <p:cNvPr id="6" name="Picture 5" descr="rId12.png"/>
-          <p:cNvPicPr>
-            <a:picLocks noChangeAspect="1"/>
-          </p:cNvPicPr>
-          <p:nvPr/>
-        </p:nvPicPr>
-        <p:blipFill>
-          <a:blip r:embed="rId2"/>
-          <a:stretch>
-            <a:fillRect/>
-          </a:stretch>
-        </p:blipFill>
-        <p:spPr>
-          <a:xfrm>
-            <a:off x="2452400" y="1417320"/>
-            <a:ext cx="7256720" cy="4800600"/>
-          </a:xfrm>
-          <a:prstGeom prst="rect">
-            <a:avLst/>
-          </a:prstGeom>
-        </p:spPr>
-      </p:pic>
+      <p:cxnSp>
+        <p:nvCxnSpPr>
+          <p:cNvPr id="6" name="Connector 5"/>
+          <p:cNvCxnSpPr/>
+          <p:nvPr/>
+        </p:nvCxnSpPr>
+        <p:spPr>
+          <a:xfrm flipH="1" flipV="1">
+            <a:off x="4338888" y="2670962"/>
+            <a:ext cx="1688379" cy="1283818"/>
+          </a:xfrm>
+          <a:prstGeom prst="line">
+            <a:avLst/>
+          </a:prstGeom>
+          <a:ln w="44450">
+            <a:solidFill>
+              <a:srgbClr val="548235"/>
+            </a:solidFill>
+          </a:ln>
+        </p:spPr>
+        <p:style>
+          <a:lnRef idx="2">
+            <a:schemeClr val="accent1"/>
+          </a:lnRef>
+          <a:fillRef idx="0">
+            <a:schemeClr val="accent1"/>
+          </a:fillRef>
+          <a:effectRef idx="1">
+            <a:schemeClr val="accent1"/>
+          </a:effectRef>
+          <a:fontRef idx="minor">
+            <a:schemeClr val="tx1"/>
+          </a:fontRef>
+        </p:style>
+      </p:cxnSp>
+      <p:cxnSp>
+        <p:nvCxnSpPr>
+          <p:cNvPr id="7" name="Connector 6"/>
+          <p:cNvCxnSpPr/>
+          <p:nvPr/>
+        </p:nvCxnSpPr>
+        <p:spPr>
+          <a:xfrm flipH="1" flipV="1">
+            <a:off x="2635999" y="1931116"/>
+            <a:ext cx="1702889" cy="739846"/>
+          </a:xfrm>
+          <a:prstGeom prst="line">
+            <a:avLst/>
+          </a:prstGeom>
+          <a:ln w="15875">
+            <a:solidFill>
+              <a:srgbClr val="548235"/>
+            </a:solidFill>
+          </a:ln>
+        </p:spPr>
+        <p:style>
+          <a:lnRef idx="2">
+            <a:schemeClr val="accent1"/>
+          </a:lnRef>
+          <a:fillRef idx="0">
+            <a:schemeClr val="accent1"/>
+          </a:fillRef>
+          <a:effectRef idx="1">
+            <a:schemeClr val="accent1"/>
+          </a:effectRef>
+          <a:fontRef idx="minor">
+            <a:schemeClr val="tx1"/>
+          </a:fontRef>
+        </p:style>
+      </p:cxnSp>
+      <p:sp>
+        <p:nvSpPr>
+          <p:cNvPr id="8" name="Rounded Rectangle 7"/>
+          <p:cNvSpPr/>
+          <p:nvPr/>
+        </p:nvSpPr>
+        <p:spPr>
+          <a:xfrm>
+            <a:off x="976642" y="1654804"/>
+            <a:ext cx="1659357" cy="552622"/>
+          </a:xfrm>
+          <a:prstGeom prst="roundRect">
+            <a:avLst>
+              <a:gd name="adj" fmla="val 50000"/>
+            </a:avLst>
+          </a:prstGeom>
+          <a:solidFill>
+            <a:srgbClr val="EDF5E8"/>
+          </a:solidFill>
+          <a:ln w="15875">
+            <a:solidFill>
+              <a:srgbClr val="548235"/>
+            </a:solidFill>
+          </a:ln>
+          <a:effectLst/>
+        </p:spPr>
+        <p:style>
+          <a:lnRef idx="1">
+            <a:schemeClr val="accent1"/>
+          </a:lnRef>
+          <a:fillRef idx="3">
+            <a:schemeClr val="accent1"/>
+          </a:fillRef>
+          <a:effectRef idx="2">
+            <a:schemeClr val="accent1"/>
+          </a:effectRef>
+          <a:fontRef idx="minor">
+            <a:schemeClr val="lt1"/>
+          </a:fontRef>
+        </p:style>
+        <p:txBody>
+          <a:bodyPr rtlCol="0" anchor="ctr" wrap="none" lIns="64000" rIns="64000" tIns="25400" bIns="25400"/>
+          <a:lstStyle/>
+          <a:p>
+            <a:pPr algn="ctr"/>
+            <a:r>
+              <a:rPr sz="1300" b="0">
+                <a:solidFill>
+                  <a:srgbClr val="000000"/>
+                </a:solidFill>
+                <a:latin typeface="Calibri"/>
+              </a:rPr>
+              <a:t>Xác định mệnh đề</a:t>
+            </a:r>
+          </a:p>
+          <a:p>
+            <a:pPr algn="ctr"/>
+            <a:r>
+              <a:rPr sz="1300" b="0">
+                <a:solidFill>
+                  <a:srgbClr val="000000"/>
+                </a:solidFill>
+                <a:latin typeface="Calibri"/>
+              </a:rPr>
+              <a:t>đúng/sai</a:t>
+            </a:r>
+          </a:p>
+        </p:txBody>
+      </p:sp>
+      <p:cxnSp>
+        <p:nvCxnSpPr>
+          <p:cNvPr id="9" name="Connector 8"/>
+          <p:cNvCxnSpPr/>
+          <p:nvPr/>
+        </p:nvCxnSpPr>
+        <p:spPr>
+          <a:xfrm flipH="1" flipV="1">
+            <a:off x="2721851" y="2457917"/>
+            <a:ext cx="1617037" cy="213045"/>
+          </a:xfrm>
+          <a:prstGeom prst="line">
+            <a:avLst/>
+          </a:prstGeom>
+          <a:ln w="15875">
+            <a:solidFill>
+              <a:srgbClr val="548235"/>
+            </a:solidFill>
+          </a:ln>
+        </p:spPr>
+        <p:style>
+          <a:lnRef idx="2">
+            <a:schemeClr val="accent1"/>
+          </a:lnRef>
+          <a:fillRef idx="0">
+            <a:schemeClr val="accent1"/>
+          </a:fillRef>
+          <a:effectRef idx="1">
+            <a:schemeClr val="accent1"/>
+          </a:effectRef>
+          <a:fontRef idx="minor">
+            <a:schemeClr val="tx1"/>
+          </a:fontRef>
+        </p:style>
+      </p:cxnSp>
+      <p:sp>
+        <p:nvSpPr>
+          <p:cNvPr id="10" name="Rounded Rectangle 9"/>
+          <p:cNvSpPr/>
+          <p:nvPr/>
+        </p:nvSpPr>
+        <p:spPr>
+          <a:xfrm>
+            <a:off x="890790" y="2282317"/>
+            <a:ext cx="1831061" cy="351200"/>
+          </a:xfrm>
+          <a:prstGeom prst="roundRect">
+            <a:avLst>
+              <a:gd name="adj" fmla="val 50000"/>
+            </a:avLst>
+          </a:prstGeom>
+          <a:solidFill>
+            <a:srgbClr val="EDF5E8"/>
+          </a:solidFill>
+          <a:ln w="15875">
+            <a:solidFill>
+              <a:srgbClr val="548235"/>
+            </a:solidFill>
+          </a:ln>
+          <a:effectLst/>
+        </p:spPr>
+        <p:style>
+          <a:lnRef idx="1">
+            <a:schemeClr val="accent1"/>
+          </a:lnRef>
+          <a:fillRef idx="3">
+            <a:schemeClr val="accent1"/>
+          </a:fillRef>
+          <a:effectRef idx="2">
+            <a:schemeClr val="accent1"/>
+          </a:effectRef>
+          <a:fontRef idx="minor">
+            <a:schemeClr val="lt1"/>
+          </a:fontRef>
+        </p:style>
+        <p:txBody>
+          <a:bodyPr rtlCol="0" anchor="ctr" wrap="none" lIns="64000" rIns="64000" tIns="25400" bIns="25400"/>
+          <a:lstStyle/>
+          <a:p>
+            <a:pPr algn="ctr"/>
+            <a:r>
+              <a:rPr sz="1300" b="0">
+                <a:solidFill>
+                  <a:srgbClr val="000000"/>
+                </a:solidFill>
+                <a:latin typeface="Calibri"/>
+              </a:rPr>
+              <a:t>Phủ định chính xác</a:t>
+            </a:r>
+          </a:p>
+        </p:txBody>
+      </p:sp>
+      <p:cxnSp>
+        <p:nvCxnSpPr>
+          <p:cNvPr id="11" name="Connector 10"/>
+          <p:cNvCxnSpPr/>
+          <p:nvPr/>
+        </p:nvCxnSpPr>
+        <p:spPr>
+          <a:xfrm flipH="1">
+            <a:off x="2464295" y="2670962"/>
+            <a:ext cx="1874593" cy="313756"/>
+          </a:xfrm>
+          <a:prstGeom prst="line">
+            <a:avLst/>
+          </a:prstGeom>
+          <a:ln w="15875">
+            <a:solidFill>
+              <a:srgbClr val="548235"/>
+            </a:solidFill>
+          </a:ln>
+        </p:spPr>
+        <p:style>
+          <a:lnRef idx="2">
+            <a:schemeClr val="accent1"/>
+          </a:lnRef>
+          <a:fillRef idx="0">
+            <a:schemeClr val="accent1"/>
+          </a:fillRef>
+          <a:effectRef idx="1">
+            <a:schemeClr val="accent1"/>
+          </a:effectRef>
+          <a:fontRef idx="minor">
+            <a:schemeClr val="tx1"/>
+          </a:fontRef>
+        </p:style>
+      </p:cxnSp>
+      <p:sp>
+        <p:nvSpPr>
+          <p:cNvPr id="12" name="Rounded Rectangle 11"/>
+          <p:cNvSpPr/>
+          <p:nvPr/>
+        </p:nvSpPr>
+        <p:spPr>
+          <a:xfrm>
+            <a:off x="1148346" y="2708407"/>
+            <a:ext cx="1315949" cy="552622"/>
+          </a:xfrm>
+          <a:prstGeom prst="roundRect">
+            <a:avLst>
+              <a:gd name="adj" fmla="val 50000"/>
+            </a:avLst>
+          </a:prstGeom>
+          <a:solidFill>
+            <a:srgbClr val="EDF5E8"/>
+          </a:solidFill>
+          <a:ln w="15875">
+            <a:solidFill>
+              <a:srgbClr val="548235"/>
+            </a:solidFill>
+          </a:ln>
+          <a:effectLst/>
+        </p:spPr>
+        <p:style>
+          <a:lnRef idx="1">
+            <a:schemeClr val="accent1"/>
+          </a:lnRef>
+          <a:fillRef idx="3">
+            <a:schemeClr val="accent1"/>
+          </a:fillRef>
+          <a:effectRef idx="2">
+            <a:schemeClr val="accent1"/>
+          </a:effectRef>
+          <a:fontRef idx="minor">
+            <a:schemeClr val="lt1"/>
+          </a:fontRef>
+        </p:style>
+        <p:txBody>
+          <a:bodyPr rtlCol="0" anchor="ctr" wrap="none" lIns="64000" rIns="64000" tIns="25400" bIns="25400"/>
+          <a:lstStyle/>
+          <a:p>
+            <a:pPr algn="ctr"/>
+            <a:r>
+              <a:rPr sz="1300" b="0">
+                <a:solidFill>
+                  <a:srgbClr val="000000"/>
+                </a:solidFill>
+                <a:latin typeface="Calibri"/>
+              </a:rPr>
+              <a:t>Mệnh đề ∀, ∃</a:t>
+            </a:r>
+          </a:p>
+          <a:p>
+            <a:pPr algn="ctr"/>
+            <a:r>
+              <a:rPr sz="1300" b="0">
+                <a:solidFill>
+                  <a:srgbClr val="000000"/>
+                </a:solidFill>
+                <a:latin typeface="Calibri"/>
+              </a:rPr>
+              <a:t>và phủ định</a:t>
+            </a:r>
+          </a:p>
+        </p:txBody>
+      </p:sp>
+      <p:cxnSp>
+        <p:nvCxnSpPr>
+          <p:cNvPr id="13" name="Connector 12"/>
+          <p:cNvCxnSpPr/>
+          <p:nvPr/>
+        </p:nvCxnSpPr>
+        <p:spPr>
+          <a:xfrm flipH="1">
+            <a:off x="2850629" y="2670962"/>
+            <a:ext cx="1488259" cy="840557"/>
+          </a:xfrm>
+          <a:prstGeom prst="line">
+            <a:avLst/>
+          </a:prstGeom>
+          <a:ln w="15875">
+            <a:solidFill>
+              <a:srgbClr val="548235"/>
+            </a:solidFill>
+          </a:ln>
+        </p:spPr>
+        <p:style>
+          <a:lnRef idx="2">
+            <a:schemeClr val="accent1"/>
+          </a:lnRef>
+          <a:fillRef idx="0">
+            <a:schemeClr val="accent1"/>
+          </a:fillRef>
+          <a:effectRef idx="1">
+            <a:schemeClr val="accent1"/>
+          </a:effectRef>
+          <a:fontRef idx="minor">
+            <a:schemeClr val="tx1"/>
+          </a:fontRef>
+        </p:style>
+      </p:cxnSp>
+      <p:sp>
+        <p:nvSpPr>
+          <p:cNvPr id="14" name="Rounded Rectangle 13"/>
+          <p:cNvSpPr/>
+          <p:nvPr/>
+        </p:nvSpPr>
+        <p:spPr>
+          <a:xfrm>
+            <a:off x="762012" y="3335919"/>
+            <a:ext cx="2088617" cy="351200"/>
+          </a:xfrm>
+          <a:prstGeom prst="roundRect">
+            <a:avLst>
+              <a:gd name="adj" fmla="val 50000"/>
+            </a:avLst>
+          </a:prstGeom>
+          <a:solidFill>
+            <a:srgbClr val="EDF5E8"/>
+          </a:solidFill>
+          <a:ln w="15875">
+            <a:solidFill>
+              <a:srgbClr val="548235"/>
+            </a:solidFill>
+          </a:ln>
+          <a:effectLst/>
+        </p:spPr>
+        <p:style>
+          <a:lnRef idx="1">
+            <a:schemeClr val="accent1"/>
+          </a:lnRef>
+          <a:fillRef idx="3">
+            <a:schemeClr val="accent1"/>
+          </a:fillRef>
+          <a:effectRef idx="2">
+            <a:schemeClr val="accent1"/>
+          </a:effectRef>
+          <a:fontRef idx="minor">
+            <a:schemeClr val="lt1"/>
+          </a:fontRef>
+        </p:style>
+        <p:txBody>
+          <a:bodyPr rtlCol="0" anchor="ctr" wrap="none" lIns="64000" rIns="64000" tIns="25400" bIns="25400"/>
+          <a:lstStyle/>
+          <a:p>
+            <a:pPr algn="ctr"/>
+            <a:r>
+              <a:rPr sz="1300" b="0">
+                <a:solidFill>
+                  <a:srgbClr val="000000"/>
+                </a:solidFill>
+                <a:latin typeface="Calibri"/>
+              </a:rPr>
+              <a:t>Chứng minh phản chứng</a:t>
+            </a:r>
+          </a:p>
+        </p:txBody>
+      </p:sp>
+      <p:sp>
+        <p:nvSpPr>
+          <p:cNvPr id="15" name="Oval 14"/>
+          <p:cNvSpPr/>
+          <p:nvPr/>
+        </p:nvSpPr>
+        <p:spPr>
+          <a:xfrm>
+            <a:off x="3710632" y="2427575"/>
+            <a:ext cx="1256513" cy="486773"/>
+          </a:xfrm>
+          <a:prstGeom prst="ellipse">
+            <a:avLst/>
+          </a:prstGeom>
+          <a:solidFill>
+            <a:srgbClr val="E2EFDA"/>
+          </a:solidFill>
+          <a:ln w="31750">
+            <a:solidFill>
+              <a:srgbClr val="375623"/>
+            </a:solidFill>
+          </a:ln>
+          <a:effectLst/>
+        </p:spPr>
+        <p:style>
+          <a:lnRef idx="1">
+            <a:schemeClr val="accent1"/>
+          </a:lnRef>
+          <a:fillRef idx="3">
+            <a:schemeClr val="accent1"/>
+          </a:fillRef>
+          <a:effectRef idx="2">
+            <a:schemeClr val="accent1"/>
+          </a:effectRef>
+          <a:fontRef idx="minor">
+            <a:schemeClr val="lt1"/>
+          </a:fontRef>
+        </p:style>
+        <p:txBody>
+          <a:bodyPr rtlCol="0" anchor="ctr" wrap="none" lIns="64000" rIns="64000" tIns="25400" bIns="25400"/>
+          <a:lstStyle/>
+          <a:p>
+            <a:pPr algn="ctr"/>
+            <a:r>
+              <a:rPr sz="1500" b="1">
+                <a:solidFill>
+                  <a:srgbClr val="000000"/>
+                </a:solidFill>
+                <a:latin typeface="Calibri"/>
+              </a:rPr>
+              <a:t>Mệnh đề</a:t>
+            </a:r>
+          </a:p>
+        </p:txBody>
+      </p:sp>
+      <p:cxnSp>
+        <p:nvCxnSpPr>
+          <p:cNvPr id="16" name="Connector 15"/>
+          <p:cNvCxnSpPr/>
+          <p:nvPr/>
+        </p:nvCxnSpPr>
+        <p:spPr>
+          <a:xfrm flipV="1">
+            <a:off x="6027267" y="2670962"/>
+            <a:ext cx="1688379" cy="1283818"/>
+          </a:xfrm>
+          <a:prstGeom prst="line">
+            <a:avLst/>
+          </a:prstGeom>
+          <a:ln w="44450">
+            <a:solidFill>
+              <a:srgbClr val="BF8F00"/>
+            </a:solidFill>
+          </a:ln>
+        </p:spPr>
+        <p:style>
+          <a:lnRef idx="2">
+            <a:schemeClr val="accent1"/>
+          </a:lnRef>
+          <a:fillRef idx="0">
+            <a:schemeClr val="accent1"/>
+          </a:fillRef>
+          <a:effectRef idx="1">
+            <a:schemeClr val="accent1"/>
+          </a:effectRef>
+          <a:fontRef idx="minor">
+            <a:schemeClr val="tx1"/>
+          </a:fontRef>
+        </p:style>
+      </p:cxnSp>
+      <p:cxnSp>
+        <p:nvCxnSpPr>
+          <p:cNvPr id="17" name="Connector 16"/>
+          <p:cNvCxnSpPr/>
+          <p:nvPr/>
+        </p:nvCxnSpPr>
+        <p:spPr>
+          <a:xfrm flipV="1">
+            <a:off x="7715646" y="1830405"/>
+            <a:ext cx="1488259" cy="840557"/>
+          </a:xfrm>
+          <a:prstGeom prst="line">
+            <a:avLst/>
+          </a:prstGeom>
+          <a:ln w="15875">
+            <a:solidFill>
+              <a:srgbClr val="BF8F00"/>
+            </a:solidFill>
+          </a:ln>
+        </p:spPr>
+        <p:style>
+          <a:lnRef idx="2">
+            <a:schemeClr val="accent1"/>
+          </a:lnRef>
+          <a:fillRef idx="0">
+            <a:schemeClr val="accent1"/>
+          </a:fillRef>
+          <a:effectRef idx="1">
+            <a:schemeClr val="accent1"/>
+          </a:effectRef>
+          <a:fontRef idx="minor">
+            <a:schemeClr val="tx1"/>
+          </a:fontRef>
+        </p:style>
+      </p:cxnSp>
+      <p:sp>
+        <p:nvSpPr>
+          <p:cNvPr id="18" name="Rounded Rectangle 17"/>
+          <p:cNvSpPr/>
+          <p:nvPr/>
+        </p:nvSpPr>
+        <p:spPr>
+          <a:xfrm>
+            <a:off x="9203905" y="1554093"/>
+            <a:ext cx="2088617" cy="552622"/>
+          </a:xfrm>
+          <a:prstGeom prst="roundRect">
+            <a:avLst>
+              <a:gd name="adj" fmla="val 50000"/>
+            </a:avLst>
+          </a:prstGeom>
+          <a:solidFill>
+            <a:srgbClr val="FFF8E1"/>
+          </a:solidFill>
+          <a:ln w="15875">
+            <a:solidFill>
+              <a:srgbClr val="BF8F00"/>
+            </a:solidFill>
+          </a:ln>
+          <a:effectLst/>
+        </p:spPr>
+        <p:style>
+          <a:lnRef idx="1">
+            <a:schemeClr val="accent1"/>
+          </a:lnRef>
+          <a:fillRef idx="3">
+            <a:schemeClr val="accent1"/>
+          </a:fillRef>
+          <a:effectRef idx="2">
+            <a:schemeClr val="accent1"/>
+          </a:effectRef>
+          <a:fontRef idx="minor">
+            <a:schemeClr val="lt1"/>
+          </a:fontRef>
+        </p:style>
+        <p:txBody>
+          <a:bodyPr rtlCol="0" anchor="ctr" wrap="none" lIns="64000" rIns="64000" tIns="25400" bIns="25400"/>
+          <a:lstStyle/>
+          <a:p>
+            <a:pPr algn="ctr"/>
+            <a:r>
+              <a:rPr sz="1300" b="0">
+                <a:solidFill>
+                  <a:srgbClr val="000000"/>
+                </a:solidFill>
+                <a:latin typeface="Calibri"/>
+              </a:rPr>
+              <a:t>Giao, hợp, hiệu, phần</a:t>
+            </a:r>
+          </a:p>
+          <a:p>
+            <a:pPr algn="ctr"/>
+            <a:r>
+              <a:rPr sz="1300" b="0">
+                <a:solidFill>
+                  <a:srgbClr val="000000"/>
+                </a:solidFill>
+                <a:latin typeface="Calibri"/>
+              </a:rPr>
+              <a:t>bù</a:t>
+            </a:r>
+          </a:p>
+        </p:txBody>
+      </p:sp>
+      <p:cxnSp>
+        <p:nvCxnSpPr>
+          <p:cNvPr id="19" name="Connector 18"/>
+          <p:cNvCxnSpPr/>
+          <p:nvPr/>
+        </p:nvCxnSpPr>
+        <p:spPr>
+          <a:xfrm flipV="1">
+            <a:off x="7715646" y="2357206"/>
+            <a:ext cx="1917519" cy="313756"/>
+          </a:xfrm>
+          <a:prstGeom prst="line">
+            <a:avLst/>
+          </a:prstGeom>
+          <a:ln w="15875">
+            <a:solidFill>
+              <a:srgbClr val="BF8F00"/>
+            </a:solidFill>
+          </a:ln>
+        </p:spPr>
+        <p:style>
+          <a:lnRef idx="2">
+            <a:schemeClr val="accent1"/>
+          </a:lnRef>
+          <a:fillRef idx="0">
+            <a:schemeClr val="accent1"/>
+          </a:fillRef>
+          <a:effectRef idx="1">
+            <a:schemeClr val="accent1"/>
+          </a:effectRef>
+          <a:fontRef idx="minor">
+            <a:schemeClr val="tx1"/>
+          </a:fontRef>
+        </p:style>
+      </p:cxnSp>
+      <p:sp>
+        <p:nvSpPr>
+          <p:cNvPr id="20" name="Rounded Rectangle 19"/>
+          <p:cNvSpPr/>
+          <p:nvPr/>
+        </p:nvSpPr>
+        <p:spPr>
+          <a:xfrm>
+            <a:off x="9633165" y="2181606"/>
+            <a:ext cx="1230097" cy="351200"/>
+          </a:xfrm>
+          <a:prstGeom prst="roundRect">
+            <a:avLst>
+              <a:gd name="adj" fmla="val 50000"/>
+            </a:avLst>
+          </a:prstGeom>
+          <a:solidFill>
+            <a:srgbClr val="FFF8E1"/>
+          </a:solidFill>
+          <a:ln w="15875">
+            <a:solidFill>
+              <a:srgbClr val="BF8F00"/>
+            </a:solidFill>
+          </a:ln>
+          <a:effectLst/>
+        </p:spPr>
+        <p:style>
+          <a:lnRef idx="1">
+            <a:schemeClr val="accent1"/>
+          </a:lnRef>
+          <a:fillRef idx="3">
+            <a:schemeClr val="accent1"/>
+          </a:fillRef>
+          <a:effectRef idx="2">
+            <a:schemeClr val="accent1"/>
+          </a:effectRef>
+          <a:fontRef idx="minor">
+            <a:schemeClr val="lt1"/>
+          </a:fontRef>
+        </p:style>
+        <p:txBody>
+          <a:bodyPr rtlCol="0" anchor="ctr" wrap="none" lIns="64000" rIns="64000" tIns="25400" bIns="25400"/>
+          <a:lstStyle/>
+          <a:p>
+            <a:pPr algn="ctr"/>
+            <a:r>
+              <a:rPr sz="1300" b="0">
+                <a:solidFill>
+                  <a:srgbClr val="000000"/>
+                </a:solidFill>
+                <a:latin typeface="Calibri"/>
+              </a:rPr>
+              <a:t>Biểu đồ Ven</a:t>
+            </a:r>
+          </a:p>
+        </p:txBody>
+      </p:sp>
+      <p:cxnSp>
+        <p:nvCxnSpPr>
+          <p:cNvPr id="21" name="Connector 20"/>
+          <p:cNvCxnSpPr/>
+          <p:nvPr/>
+        </p:nvCxnSpPr>
+        <p:spPr>
+          <a:xfrm>
+            <a:off x="7715646" y="2670962"/>
+            <a:ext cx="1788741" cy="213045"/>
+          </a:xfrm>
+          <a:prstGeom prst="line">
+            <a:avLst/>
+          </a:prstGeom>
+          <a:ln w="15875">
+            <a:solidFill>
+              <a:srgbClr val="BF8F00"/>
+            </a:solidFill>
+          </a:ln>
+        </p:spPr>
+        <p:style>
+          <a:lnRef idx="2">
+            <a:schemeClr val="accent1"/>
+          </a:lnRef>
+          <a:fillRef idx="0">
+            <a:schemeClr val="accent1"/>
+          </a:fillRef>
+          <a:effectRef idx="1">
+            <a:schemeClr val="accent1"/>
+          </a:effectRef>
+          <a:fontRef idx="minor">
+            <a:schemeClr val="tx1"/>
+          </a:fontRef>
+        </p:style>
+      </p:cxnSp>
+      <p:sp>
+        <p:nvSpPr>
+          <p:cNvPr id="22" name="Rounded Rectangle 21"/>
+          <p:cNvSpPr/>
+          <p:nvPr/>
+        </p:nvSpPr>
+        <p:spPr>
+          <a:xfrm>
+            <a:off x="9504387" y="2607696"/>
+            <a:ext cx="1487653" cy="552622"/>
+          </a:xfrm>
+          <a:prstGeom prst="roundRect">
+            <a:avLst>
+              <a:gd name="adj" fmla="val 50000"/>
+            </a:avLst>
+          </a:prstGeom>
+          <a:solidFill>
+            <a:srgbClr val="FFF8E1"/>
+          </a:solidFill>
+          <a:ln w="15875">
+            <a:solidFill>
+              <a:srgbClr val="BF8F00"/>
+            </a:solidFill>
+          </a:ln>
+          <a:effectLst/>
+        </p:spPr>
+        <p:style>
+          <a:lnRef idx="1">
+            <a:schemeClr val="accent1"/>
+          </a:lnRef>
+          <a:fillRef idx="3">
+            <a:schemeClr val="accent1"/>
+          </a:fillRef>
+          <a:effectRef idx="2">
+            <a:schemeClr val="accent1"/>
+          </a:effectRef>
+          <a:fontRef idx="minor">
+            <a:schemeClr val="lt1"/>
+          </a:fontRef>
+        </p:style>
+        <p:txBody>
+          <a:bodyPr rtlCol="0" anchor="ctr" wrap="none" lIns="64000" rIns="64000" tIns="25400" bIns="25400"/>
+          <a:lstStyle/>
+          <a:p>
+            <a:pPr algn="ctr"/>
+            <a:r>
+              <a:rPr sz="1300" b="0">
+                <a:solidFill>
+                  <a:srgbClr val="000000"/>
+                </a:solidFill>
+                <a:latin typeface="Calibri"/>
+              </a:rPr>
+              <a:t>Chứng minh A ⊂</a:t>
+            </a:r>
+          </a:p>
+          <a:p>
+            <a:pPr algn="ctr"/>
+            <a:r>
+              <a:rPr sz="1300" b="0">
+                <a:solidFill>
+                  <a:srgbClr val="000000"/>
+                </a:solidFill>
+                <a:latin typeface="Calibri"/>
+              </a:rPr>
+              <a:t>B</a:t>
+            </a:r>
+          </a:p>
+        </p:txBody>
+      </p:sp>
+      <p:cxnSp>
+        <p:nvCxnSpPr>
+          <p:cNvPr id="23" name="Connector 22"/>
+          <p:cNvCxnSpPr/>
+          <p:nvPr/>
+        </p:nvCxnSpPr>
+        <p:spPr>
+          <a:xfrm>
+            <a:off x="7715646" y="2670962"/>
+            <a:ext cx="1702889" cy="840557"/>
+          </a:xfrm>
+          <a:prstGeom prst="line">
+            <a:avLst/>
+          </a:prstGeom>
+          <a:ln w="15875">
+            <a:solidFill>
+              <a:srgbClr val="BF8F00"/>
+            </a:solidFill>
+          </a:ln>
+        </p:spPr>
+        <p:style>
+          <a:lnRef idx="2">
+            <a:schemeClr val="accent1"/>
+          </a:lnRef>
+          <a:fillRef idx="0">
+            <a:schemeClr val="accent1"/>
+          </a:fillRef>
+          <a:effectRef idx="1">
+            <a:schemeClr val="accent1"/>
+          </a:effectRef>
+          <a:fontRef idx="minor">
+            <a:schemeClr val="tx1"/>
+          </a:fontRef>
+        </p:style>
+      </p:cxnSp>
+      <p:sp>
+        <p:nvSpPr>
+          <p:cNvPr id="24" name="Rounded Rectangle 23"/>
+          <p:cNvSpPr/>
+          <p:nvPr/>
+        </p:nvSpPr>
+        <p:spPr>
+          <a:xfrm>
+            <a:off x="9418535" y="3235208"/>
+            <a:ext cx="1659357" cy="552622"/>
+          </a:xfrm>
+          <a:prstGeom prst="roundRect">
+            <a:avLst>
+              <a:gd name="adj" fmla="val 50000"/>
+            </a:avLst>
+          </a:prstGeom>
+          <a:solidFill>
+            <a:srgbClr val="FFF8E1"/>
+          </a:solidFill>
+          <a:ln w="15875">
+            <a:solidFill>
+              <a:srgbClr val="BF8F00"/>
+            </a:solidFill>
+          </a:ln>
+          <a:effectLst/>
+        </p:spPr>
+        <p:style>
+          <a:lnRef idx="1">
+            <a:schemeClr val="accent1"/>
+          </a:lnRef>
+          <a:fillRef idx="3">
+            <a:schemeClr val="accent1"/>
+          </a:fillRef>
+          <a:effectRef idx="2">
+            <a:schemeClr val="accent1"/>
+          </a:effectRef>
+          <a:fontRef idx="minor">
+            <a:schemeClr val="lt1"/>
+          </a:fontRef>
+        </p:style>
+        <p:txBody>
+          <a:bodyPr rtlCol="0" anchor="ctr" wrap="none" lIns="64000" rIns="64000" tIns="25400" bIns="25400"/>
+          <a:lstStyle/>
+          <a:p>
+            <a:pPr algn="ctr"/>
+            <a:r>
+              <a:rPr sz="1300" b="0">
+                <a:solidFill>
+                  <a:srgbClr val="000000"/>
+                </a:solidFill>
+                <a:latin typeface="Calibri"/>
+              </a:rPr>
+              <a:t>Bài toán thực tế</a:t>
+            </a:r>
+          </a:p>
+          <a:p>
+            <a:pPr algn="ctr"/>
+            <a:r>
+              <a:rPr sz="1300" b="0">
+                <a:solidFill>
+                  <a:srgbClr val="000000"/>
+                </a:solidFill>
+                <a:latin typeface="Calibri"/>
+              </a:rPr>
+              <a:t>đếm số phần tử</a:t>
+            </a:r>
+          </a:p>
+        </p:txBody>
+      </p:sp>
+      <p:sp>
+        <p:nvSpPr>
+          <p:cNvPr id="25" name="Oval 24"/>
+          <p:cNvSpPr/>
+          <p:nvPr/>
+        </p:nvSpPr>
+        <p:spPr>
+          <a:xfrm>
+            <a:off x="7087389" y="2427575"/>
+            <a:ext cx="1256513" cy="486773"/>
+          </a:xfrm>
+          <a:prstGeom prst="ellipse">
+            <a:avLst/>
+          </a:prstGeom>
+          <a:solidFill>
+            <a:srgbClr val="FFF2CC"/>
+          </a:solidFill>
+          <a:ln w="31750">
+            <a:solidFill>
+              <a:srgbClr val="BF8F00"/>
+            </a:solidFill>
+          </a:ln>
+          <a:effectLst/>
+        </p:spPr>
+        <p:style>
+          <a:lnRef idx="1">
+            <a:schemeClr val="accent1"/>
+          </a:lnRef>
+          <a:fillRef idx="3">
+            <a:schemeClr val="accent1"/>
+          </a:fillRef>
+          <a:effectRef idx="2">
+            <a:schemeClr val="accent1"/>
+          </a:effectRef>
+          <a:fontRef idx="minor">
+            <a:schemeClr val="lt1"/>
+          </a:fontRef>
+        </p:style>
+        <p:txBody>
+          <a:bodyPr rtlCol="0" anchor="ctr" wrap="none" lIns="64000" rIns="64000" tIns="25400" bIns="25400"/>
+          <a:lstStyle/>
+          <a:p>
+            <a:pPr algn="ctr"/>
+            <a:r>
+              <a:rPr sz="1500" b="1">
+                <a:solidFill>
+                  <a:srgbClr val="000000"/>
+                </a:solidFill>
+                <a:latin typeface="Calibri"/>
+              </a:rPr>
+              <a:t>Tập hợp</a:t>
+            </a:r>
+          </a:p>
+        </p:txBody>
+      </p:sp>
+      <p:cxnSp>
+        <p:nvCxnSpPr>
+          <p:cNvPr id="26" name="Connector 25"/>
+          <p:cNvCxnSpPr/>
+          <p:nvPr/>
+        </p:nvCxnSpPr>
+        <p:spPr>
+          <a:xfrm flipH="1">
+            <a:off x="4338888" y="3954780"/>
+            <a:ext cx="1688379" cy="1283817"/>
+          </a:xfrm>
+          <a:prstGeom prst="line">
+            <a:avLst/>
+          </a:prstGeom>
+          <a:ln w="44450">
+            <a:solidFill>
+              <a:srgbClr val="2F5597"/>
+            </a:solidFill>
+          </a:ln>
+        </p:spPr>
+        <p:style>
+          <a:lnRef idx="2">
+            <a:schemeClr val="accent1"/>
+          </a:lnRef>
+          <a:fillRef idx="0">
+            <a:schemeClr val="accent1"/>
+          </a:fillRef>
+          <a:effectRef idx="1">
+            <a:schemeClr val="accent1"/>
+          </a:effectRef>
+          <a:fontRef idx="minor">
+            <a:schemeClr val="tx1"/>
+          </a:fontRef>
+        </p:style>
+      </p:cxnSp>
+      <p:cxnSp>
+        <p:nvCxnSpPr>
+          <p:cNvPr id="27" name="Connector 26"/>
+          <p:cNvCxnSpPr/>
+          <p:nvPr/>
+        </p:nvCxnSpPr>
+        <p:spPr>
+          <a:xfrm flipH="1" flipV="1">
+            <a:off x="2593073" y="4611085"/>
+            <a:ext cx="1745815" cy="627512"/>
+          </a:xfrm>
+          <a:prstGeom prst="line">
+            <a:avLst/>
+          </a:prstGeom>
+          <a:ln w="15875">
+            <a:solidFill>
+              <a:srgbClr val="2F5597"/>
+            </a:solidFill>
+          </a:ln>
+        </p:spPr>
+        <p:style>
+          <a:lnRef idx="2">
+            <a:schemeClr val="accent1"/>
+          </a:lnRef>
+          <a:fillRef idx="0">
+            <a:schemeClr val="accent1"/>
+          </a:fillRef>
+          <a:effectRef idx="1">
+            <a:schemeClr val="accent1"/>
+          </a:effectRef>
+          <a:fontRef idx="minor">
+            <a:schemeClr val="tx1"/>
+          </a:fontRef>
+        </p:style>
+      </p:cxnSp>
+      <p:sp>
+        <p:nvSpPr>
+          <p:cNvPr id="28" name="Rounded Rectangle 27"/>
+          <p:cNvSpPr/>
+          <p:nvPr/>
+        </p:nvSpPr>
+        <p:spPr>
+          <a:xfrm>
+            <a:off x="1019568" y="4334774"/>
+            <a:ext cx="1573505" cy="552622"/>
+          </a:xfrm>
+          <a:prstGeom prst="roundRect">
+            <a:avLst>
+              <a:gd name="adj" fmla="val 50000"/>
+            </a:avLst>
+          </a:prstGeom>
+          <a:solidFill>
+            <a:srgbClr val="E3EEF9"/>
+          </a:solidFill>
+          <a:ln w="15875">
+            <a:solidFill>
+              <a:srgbClr val="2F5597"/>
+            </a:solidFill>
+          </a:ln>
+          <a:effectLst/>
+        </p:spPr>
+        <p:style>
+          <a:lnRef idx="1">
+            <a:schemeClr val="accent1"/>
+          </a:lnRef>
+          <a:fillRef idx="3">
+            <a:schemeClr val="accent1"/>
+          </a:fillRef>
+          <a:effectRef idx="2">
+            <a:schemeClr val="accent1"/>
+          </a:effectRef>
+          <a:fontRef idx="minor">
+            <a:schemeClr val="lt1"/>
+          </a:fontRef>
+        </p:style>
+        <p:txBody>
+          <a:bodyPr rtlCol="0" anchor="ctr" wrap="none" lIns="64000" rIns="64000" tIns="25400" bIns="25400"/>
+          <a:lstStyle/>
+          <a:p>
+            <a:pPr algn="ctr"/>
+            <a:r>
+              <a:rPr sz="1300" b="0">
+                <a:solidFill>
+                  <a:srgbClr val="000000"/>
+                </a:solidFill>
+                <a:latin typeface="Calibri"/>
+              </a:rPr>
+              <a:t>Đọc đề, vẽ biểu</a:t>
+            </a:r>
+          </a:p>
+          <a:p>
+            <a:pPr algn="ctr"/>
+            <a:r>
+              <a:rPr sz="1300" b="0">
+                <a:solidFill>
+                  <a:srgbClr val="000000"/>
+                </a:solidFill>
+                <a:latin typeface="Calibri"/>
+              </a:rPr>
+              <a:t>đồ</a:t>
+            </a:r>
+          </a:p>
+        </p:txBody>
+      </p:sp>
+      <p:cxnSp>
+        <p:nvCxnSpPr>
+          <p:cNvPr id="29" name="Connector 28"/>
+          <p:cNvCxnSpPr/>
+          <p:nvPr/>
+        </p:nvCxnSpPr>
+        <p:spPr>
+          <a:xfrm flipH="1">
+            <a:off x="2893555" y="5238597"/>
+            <a:ext cx="1445333" cy="0"/>
+          </a:xfrm>
+          <a:prstGeom prst="line">
+            <a:avLst/>
+          </a:prstGeom>
+          <a:ln w="15875">
+            <a:solidFill>
+              <a:srgbClr val="2F5597"/>
+            </a:solidFill>
+          </a:ln>
+        </p:spPr>
+        <p:style>
+          <a:lnRef idx="2">
+            <a:schemeClr val="accent1"/>
+          </a:lnRef>
+          <a:fillRef idx="0">
+            <a:schemeClr val="accent1"/>
+          </a:fillRef>
+          <a:effectRef idx="1">
+            <a:schemeClr val="accent1"/>
+          </a:effectRef>
+          <a:fontRef idx="minor">
+            <a:schemeClr val="tx1"/>
+          </a:fontRef>
+        </p:style>
+      </p:cxnSp>
+      <p:sp>
+        <p:nvSpPr>
+          <p:cNvPr id="30" name="Rounded Rectangle 29"/>
+          <p:cNvSpPr/>
+          <p:nvPr/>
+        </p:nvSpPr>
+        <p:spPr>
+          <a:xfrm>
+            <a:off x="719086" y="4962286"/>
+            <a:ext cx="2174469" cy="552622"/>
+          </a:xfrm>
+          <a:prstGeom prst="roundRect">
+            <a:avLst>
+              <a:gd name="adj" fmla="val 50000"/>
+            </a:avLst>
+          </a:prstGeom>
+          <a:solidFill>
+            <a:srgbClr val="E3EEF9"/>
+          </a:solidFill>
+          <a:ln w="15875">
+            <a:solidFill>
+              <a:srgbClr val="2F5597"/>
+            </a:solidFill>
+          </a:ln>
+          <a:effectLst/>
+        </p:spPr>
+        <p:style>
+          <a:lnRef idx="1">
+            <a:schemeClr val="accent1"/>
+          </a:lnRef>
+          <a:fillRef idx="3">
+            <a:schemeClr val="accent1"/>
+          </a:fillRef>
+          <a:effectRef idx="2">
+            <a:schemeClr val="accent1"/>
+          </a:effectRef>
+          <a:fontRef idx="minor">
+            <a:schemeClr val="lt1"/>
+          </a:fontRef>
+        </p:style>
+        <p:txBody>
+          <a:bodyPr rtlCol="0" anchor="ctr" wrap="none" lIns="64000" rIns="64000" tIns="25400" bIns="25400"/>
+          <a:lstStyle/>
+          <a:p>
+            <a:pPr algn="ctr"/>
+            <a:r>
+              <a:rPr sz="1300" b="0">
+                <a:solidFill>
+                  <a:srgbClr val="000000"/>
+                </a:solidFill>
+                <a:latin typeface="Calibri"/>
+              </a:rPr>
+              <a:t>Chọn phương pháp chứng</a:t>
+            </a:r>
+          </a:p>
+          <a:p>
+            <a:pPr algn="ctr"/>
+            <a:r>
+              <a:rPr sz="1300" b="0">
+                <a:solidFill>
+                  <a:srgbClr val="000000"/>
+                </a:solidFill>
+                <a:latin typeface="Calibri"/>
+              </a:rPr>
+              <a:t>minh</a:t>
+            </a:r>
+          </a:p>
+        </p:txBody>
+      </p:sp>
+      <p:cxnSp>
+        <p:nvCxnSpPr>
+          <p:cNvPr id="31" name="Connector 30"/>
+          <p:cNvCxnSpPr/>
+          <p:nvPr/>
+        </p:nvCxnSpPr>
+        <p:spPr>
+          <a:xfrm flipH="1">
+            <a:off x="2635999" y="5238597"/>
+            <a:ext cx="1702889" cy="627512"/>
+          </a:xfrm>
+          <a:prstGeom prst="line">
+            <a:avLst/>
+          </a:prstGeom>
+          <a:ln w="15875">
+            <a:solidFill>
+              <a:srgbClr val="2F5597"/>
+            </a:solidFill>
+          </a:ln>
+        </p:spPr>
+        <p:style>
+          <a:lnRef idx="2">
+            <a:schemeClr val="accent1"/>
+          </a:lnRef>
+          <a:fillRef idx="0">
+            <a:schemeClr val="accent1"/>
+          </a:fillRef>
+          <a:effectRef idx="1">
+            <a:schemeClr val="accent1"/>
+          </a:effectRef>
+          <a:fontRef idx="minor">
+            <a:schemeClr val="tx1"/>
+          </a:fontRef>
+        </p:style>
+      </p:cxnSp>
+      <p:sp>
+        <p:nvSpPr>
+          <p:cNvPr id="32" name="Rounded Rectangle 31"/>
+          <p:cNvSpPr/>
+          <p:nvPr/>
+        </p:nvSpPr>
+        <p:spPr>
+          <a:xfrm>
+            <a:off x="976642" y="5589798"/>
+            <a:ext cx="1659357" cy="552622"/>
+          </a:xfrm>
+          <a:prstGeom prst="roundRect">
+            <a:avLst>
+              <a:gd name="adj" fmla="val 50000"/>
+            </a:avLst>
+          </a:prstGeom>
+          <a:solidFill>
+            <a:srgbClr val="E3EEF9"/>
+          </a:solidFill>
+          <a:ln w="15875">
+            <a:solidFill>
+              <a:srgbClr val="2F5597"/>
+            </a:solidFill>
+          </a:ln>
+          <a:effectLst/>
+        </p:spPr>
+        <p:style>
+          <a:lnRef idx="1">
+            <a:schemeClr val="accent1"/>
+          </a:lnRef>
+          <a:fillRef idx="3">
+            <a:schemeClr val="accent1"/>
+          </a:fillRef>
+          <a:effectRef idx="2">
+            <a:schemeClr val="accent1"/>
+          </a:effectRef>
+          <a:fontRef idx="minor">
+            <a:schemeClr val="lt1"/>
+          </a:fontRef>
+        </p:style>
+        <p:txBody>
+          <a:bodyPr rtlCol="0" anchor="ctr" wrap="none" lIns="64000" rIns="64000" tIns="25400" bIns="25400"/>
+          <a:lstStyle/>
+          <a:p>
+            <a:pPr algn="ctr"/>
+            <a:r>
+              <a:rPr sz="1300" b="0">
+                <a:solidFill>
+                  <a:srgbClr val="000000"/>
+                </a:solidFill>
+                <a:latin typeface="Calibri"/>
+              </a:rPr>
+              <a:t>Kiểm tra lại kết</a:t>
+            </a:r>
+          </a:p>
+          <a:p>
+            <a:pPr algn="ctr"/>
+            <a:r>
+              <a:rPr sz="1300" b="0">
+                <a:solidFill>
+                  <a:srgbClr val="000000"/>
+                </a:solidFill>
+                <a:latin typeface="Calibri"/>
+              </a:rPr>
+              <a:t>quả</a:t>
+            </a:r>
+          </a:p>
+        </p:txBody>
+      </p:sp>
+      <p:sp>
+        <p:nvSpPr>
+          <p:cNvPr id="33" name="Oval 32"/>
+          <p:cNvSpPr/>
+          <p:nvPr/>
+        </p:nvSpPr>
+        <p:spPr>
+          <a:xfrm>
+            <a:off x="3086554" y="4995210"/>
+            <a:ext cx="2504669" cy="486773"/>
+          </a:xfrm>
+          <a:prstGeom prst="ellipse">
+            <a:avLst/>
+          </a:prstGeom>
+          <a:solidFill>
+            <a:srgbClr val="E2EFDA"/>
+          </a:solidFill>
+          <a:ln w="31750">
+            <a:solidFill>
+              <a:srgbClr val="375623"/>
+            </a:solidFill>
+          </a:ln>
+          <a:effectLst/>
+        </p:spPr>
+        <p:style>
+          <a:lnRef idx="1">
+            <a:schemeClr val="accent1"/>
+          </a:lnRef>
+          <a:fillRef idx="3">
+            <a:schemeClr val="accent1"/>
+          </a:fillRef>
+          <a:effectRef idx="2">
+            <a:schemeClr val="accent1"/>
+          </a:effectRef>
+          <a:fontRef idx="minor">
+            <a:schemeClr val="lt1"/>
+          </a:fontRef>
+        </p:style>
+        <p:txBody>
+          <a:bodyPr rtlCol="0" anchor="ctr" wrap="none" lIns="64000" rIns="64000" tIns="25400" bIns="25400"/>
+          <a:lstStyle/>
+          <a:p>
+            <a:pPr algn="ctr"/>
+            <a:r>
+              <a:rPr sz="1500" b="1">
+                <a:solidFill>
+                  <a:srgbClr val="000000"/>
+                </a:solidFill>
+                <a:latin typeface="Calibri"/>
+              </a:rPr>
+              <a:t>Phương pháp giải</a:t>
+            </a:r>
+          </a:p>
+        </p:txBody>
+      </p:sp>
+      <p:cxnSp>
+        <p:nvCxnSpPr>
+          <p:cNvPr id="34" name="Connector 33"/>
+          <p:cNvCxnSpPr/>
+          <p:nvPr/>
+        </p:nvCxnSpPr>
+        <p:spPr>
+          <a:xfrm>
+            <a:off x="6027267" y="3954780"/>
+            <a:ext cx="1688379" cy="1283817"/>
+          </a:xfrm>
+          <a:prstGeom prst="line">
+            <a:avLst/>
+          </a:prstGeom>
+          <a:ln w="44450">
+            <a:solidFill>
+              <a:srgbClr val="7030A0"/>
+            </a:solidFill>
+          </a:ln>
+        </p:spPr>
+        <p:style>
+          <a:lnRef idx="2">
+            <a:schemeClr val="accent1"/>
+          </a:lnRef>
+          <a:fillRef idx="0">
+            <a:schemeClr val="accent1"/>
+          </a:fillRef>
+          <a:effectRef idx="1">
+            <a:schemeClr val="accent1"/>
+          </a:effectRef>
+          <a:fontRef idx="minor">
+            <a:schemeClr val="tx1"/>
+          </a:fontRef>
+        </p:style>
+      </p:cxnSp>
+      <p:cxnSp>
+        <p:nvCxnSpPr>
+          <p:cNvPr id="35" name="Connector 34"/>
+          <p:cNvCxnSpPr/>
+          <p:nvPr/>
+        </p:nvCxnSpPr>
+        <p:spPr>
+          <a:xfrm flipV="1">
+            <a:off x="7715646" y="4599462"/>
+            <a:ext cx="1574111" cy="639135"/>
+          </a:xfrm>
+          <a:prstGeom prst="line">
+            <a:avLst/>
+          </a:prstGeom>
+          <a:ln w="15875">
+            <a:solidFill>
+              <a:srgbClr val="7030A0"/>
+            </a:solidFill>
+          </a:ln>
+        </p:spPr>
+        <p:style>
+          <a:lnRef idx="2">
+            <a:schemeClr val="accent1"/>
+          </a:lnRef>
+          <a:fillRef idx="0">
+            <a:schemeClr val="accent1"/>
+          </a:fillRef>
+          <a:effectRef idx="1">
+            <a:schemeClr val="accent1"/>
+          </a:effectRef>
+          <a:fontRef idx="minor">
+            <a:schemeClr val="tx1"/>
+          </a:fontRef>
+        </p:style>
+      </p:cxnSp>
+      <p:sp>
+        <p:nvSpPr>
+          <p:cNvPr id="36" name="Rounded Rectangle 35"/>
+          <p:cNvSpPr/>
+          <p:nvPr/>
+        </p:nvSpPr>
+        <p:spPr>
+          <a:xfrm>
+            <a:off x="9289757" y="4323151"/>
+            <a:ext cx="1916913" cy="552622"/>
+          </a:xfrm>
+          <a:prstGeom prst="roundRect">
+            <a:avLst>
+              <a:gd name="adj" fmla="val 50000"/>
+            </a:avLst>
+          </a:prstGeom>
+          <a:solidFill>
+            <a:srgbClr val="F3E8F7"/>
+          </a:solidFill>
+          <a:ln w="15875">
+            <a:solidFill>
+              <a:srgbClr val="7030A0"/>
+            </a:solidFill>
+          </a:ln>
+          <a:effectLst/>
+        </p:spPr>
+        <p:style>
+          <a:lnRef idx="1">
+            <a:schemeClr val="accent1"/>
+          </a:lnRef>
+          <a:fillRef idx="3">
+            <a:schemeClr val="accent1"/>
+          </a:fillRef>
+          <a:effectRef idx="2">
+            <a:schemeClr val="accent1"/>
+          </a:effectRef>
+          <a:fontRef idx="minor">
+            <a:schemeClr val="lt1"/>
+          </a:fontRef>
+        </p:style>
+        <p:txBody>
+          <a:bodyPr rtlCol="0" anchor="ctr" wrap="none" lIns="64000" rIns="64000" tIns="25400" bIns="25400"/>
+          <a:lstStyle/>
+          <a:p>
+            <a:pPr algn="ctr"/>
+            <a:r>
+              <a:rPr sz="1300" b="0">
+                <a:solidFill>
+                  <a:srgbClr val="000000"/>
+                </a:solidFill>
+                <a:latin typeface="Calibri"/>
+              </a:rPr>
+              <a:t>Phủ định nhầm lượng</a:t>
+            </a:r>
+          </a:p>
+          <a:p>
+            <a:pPr algn="ctr"/>
+            <a:r>
+              <a:rPr sz="1300" b="0">
+                <a:solidFill>
+                  <a:srgbClr val="000000"/>
+                </a:solidFill>
+                <a:latin typeface="Calibri"/>
+              </a:rPr>
+              <a:t>từ</a:t>
+            </a:r>
+          </a:p>
+        </p:txBody>
+      </p:sp>
+      <p:cxnSp>
+        <p:nvCxnSpPr>
+          <p:cNvPr id="37" name="Connector 36"/>
+          <p:cNvCxnSpPr/>
+          <p:nvPr/>
+        </p:nvCxnSpPr>
+        <p:spPr>
+          <a:xfrm flipV="1">
+            <a:off x="7715646" y="5126263"/>
+            <a:ext cx="1574111" cy="112334"/>
+          </a:xfrm>
+          <a:prstGeom prst="line">
+            <a:avLst/>
+          </a:prstGeom>
+          <a:ln w="15875">
+            <a:solidFill>
+              <a:srgbClr val="7030A0"/>
+            </a:solidFill>
+          </a:ln>
+        </p:spPr>
+        <p:style>
+          <a:lnRef idx="2">
+            <a:schemeClr val="accent1"/>
+          </a:lnRef>
+          <a:fillRef idx="0">
+            <a:schemeClr val="accent1"/>
+          </a:fillRef>
+          <a:effectRef idx="1">
+            <a:schemeClr val="accent1"/>
+          </a:effectRef>
+          <a:fontRef idx="minor">
+            <a:schemeClr val="tx1"/>
+          </a:fontRef>
+        </p:style>
+      </p:cxnSp>
+      <p:sp>
+        <p:nvSpPr>
+          <p:cNvPr id="38" name="Rounded Rectangle 37"/>
+          <p:cNvSpPr/>
+          <p:nvPr/>
+        </p:nvSpPr>
+        <p:spPr>
+          <a:xfrm>
+            <a:off x="9289757" y="4950663"/>
+            <a:ext cx="1916913" cy="351200"/>
+          </a:xfrm>
+          <a:prstGeom prst="roundRect">
+            <a:avLst>
+              <a:gd name="adj" fmla="val 50000"/>
+            </a:avLst>
+          </a:prstGeom>
+          <a:solidFill>
+            <a:srgbClr val="F3E8F7"/>
+          </a:solidFill>
+          <a:ln w="15875">
+            <a:solidFill>
+              <a:srgbClr val="7030A0"/>
+            </a:solidFill>
+          </a:ln>
+          <a:effectLst/>
+        </p:spPr>
+        <p:style>
+          <a:lnRef idx="1">
+            <a:schemeClr val="accent1"/>
+          </a:lnRef>
+          <a:fillRef idx="3">
+            <a:schemeClr val="accent1"/>
+          </a:fillRef>
+          <a:effectRef idx="2">
+            <a:schemeClr val="accent1"/>
+          </a:effectRef>
+          <a:fontRef idx="minor">
+            <a:schemeClr val="lt1"/>
+          </a:fontRef>
+        </p:style>
+        <p:txBody>
+          <a:bodyPr rtlCol="0" anchor="ctr" wrap="none" lIns="64000" rIns="64000" tIns="25400" bIns="25400"/>
+          <a:lstStyle/>
+          <a:p>
+            <a:pPr algn="ctr"/>
+            <a:r>
+              <a:rPr sz="1300" b="0">
+                <a:solidFill>
+                  <a:srgbClr val="000000"/>
+                </a:solidFill>
+                <a:latin typeface="Calibri"/>
+              </a:rPr>
+              <a:t>Quên điều kiện biên</a:t>
+            </a:r>
+          </a:p>
+        </p:txBody>
+      </p:sp>
+      <p:cxnSp>
+        <p:nvCxnSpPr>
+          <p:cNvPr id="39" name="Connector 38"/>
+          <p:cNvCxnSpPr/>
+          <p:nvPr/>
+        </p:nvCxnSpPr>
+        <p:spPr>
+          <a:xfrm>
+            <a:off x="7715646" y="5238597"/>
+            <a:ext cx="1745815" cy="313756"/>
+          </a:xfrm>
+          <a:prstGeom prst="line">
+            <a:avLst/>
+          </a:prstGeom>
+          <a:ln w="15875">
+            <a:solidFill>
+              <a:srgbClr val="7030A0"/>
+            </a:solidFill>
+          </a:ln>
+        </p:spPr>
+        <p:style>
+          <a:lnRef idx="2">
+            <a:schemeClr val="accent1"/>
+          </a:lnRef>
+          <a:fillRef idx="0">
+            <a:schemeClr val="accent1"/>
+          </a:fillRef>
+          <a:effectRef idx="1">
+            <a:schemeClr val="accent1"/>
+          </a:effectRef>
+          <a:fontRef idx="minor">
+            <a:schemeClr val="tx1"/>
+          </a:fontRef>
+        </p:style>
+      </p:cxnSp>
+      <p:sp>
+        <p:nvSpPr>
+          <p:cNvPr id="40" name="Rounded Rectangle 39"/>
+          <p:cNvSpPr/>
+          <p:nvPr/>
+        </p:nvSpPr>
+        <p:spPr>
+          <a:xfrm>
+            <a:off x="9461461" y="5376753"/>
+            <a:ext cx="1573505" cy="351200"/>
+          </a:xfrm>
+          <a:prstGeom prst="roundRect">
+            <a:avLst>
+              <a:gd name="adj" fmla="val 50000"/>
+            </a:avLst>
+          </a:prstGeom>
+          <a:solidFill>
+            <a:srgbClr val="F3E8F7"/>
+          </a:solidFill>
+          <a:ln w="15875">
+            <a:solidFill>
+              <a:srgbClr val="7030A0"/>
+            </a:solidFill>
+          </a:ln>
+          <a:effectLst/>
+        </p:spPr>
+        <p:style>
+          <a:lnRef idx="1">
+            <a:schemeClr val="accent1"/>
+          </a:lnRef>
+          <a:fillRef idx="3">
+            <a:schemeClr val="accent1"/>
+          </a:fillRef>
+          <a:effectRef idx="2">
+            <a:schemeClr val="accent1"/>
+          </a:effectRef>
+          <a:fontRef idx="minor">
+            <a:schemeClr val="lt1"/>
+          </a:fontRef>
+        </p:style>
+        <p:txBody>
+          <a:bodyPr rtlCol="0" anchor="ctr" wrap="none" lIns="64000" rIns="64000" tIns="25400" bIns="25400"/>
+          <a:lstStyle/>
+          <a:p>
+            <a:pPr algn="ctr"/>
+            <a:r>
+              <a:rPr sz="1300" b="0">
+                <a:solidFill>
+                  <a:srgbClr val="000000"/>
+                </a:solidFill>
+                <a:latin typeface="Calibri"/>
+              </a:rPr>
+              <a:t>Nhầm giao – hợp</a:t>
+            </a:r>
+          </a:p>
+        </p:txBody>
+      </p:sp>
+      <p:cxnSp>
+        <p:nvCxnSpPr>
+          <p:cNvPr id="41" name="Connector 40"/>
+          <p:cNvCxnSpPr/>
+          <p:nvPr/>
+        </p:nvCxnSpPr>
+        <p:spPr>
+          <a:xfrm>
+            <a:off x="7715646" y="5238597"/>
+            <a:ext cx="1831667" cy="739846"/>
+          </a:xfrm>
+          <a:prstGeom prst="line">
+            <a:avLst/>
+          </a:prstGeom>
+          <a:ln w="15875">
+            <a:solidFill>
+              <a:srgbClr val="7030A0"/>
+            </a:solidFill>
+          </a:ln>
+        </p:spPr>
+        <p:style>
+          <a:lnRef idx="2">
+            <a:schemeClr val="accent1"/>
+          </a:lnRef>
+          <a:fillRef idx="0">
+            <a:schemeClr val="accent1"/>
+          </a:fillRef>
+          <a:effectRef idx="1">
+            <a:schemeClr val="accent1"/>
+          </a:effectRef>
+          <a:fontRef idx="minor">
+            <a:schemeClr val="tx1"/>
+          </a:fontRef>
+        </p:style>
+      </p:cxnSp>
+      <p:sp>
+        <p:nvSpPr>
+          <p:cNvPr id="42" name="Rounded Rectangle 41"/>
+          <p:cNvSpPr/>
+          <p:nvPr/>
+        </p:nvSpPr>
+        <p:spPr>
+          <a:xfrm>
+            <a:off x="9547313" y="5802843"/>
+            <a:ext cx="1401801" cy="351200"/>
+          </a:xfrm>
+          <a:prstGeom prst="roundRect">
+            <a:avLst>
+              <a:gd name="adj" fmla="val 50000"/>
+            </a:avLst>
+          </a:prstGeom>
+          <a:solidFill>
+            <a:srgbClr val="F3E8F7"/>
+          </a:solidFill>
+          <a:ln w="15875">
+            <a:solidFill>
+              <a:srgbClr val="7030A0"/>
+            </a:solidFill>
+          </a:ln>
+          <a:effectLst/>
+        </p:spPr>
+        <p:style>
+          <a:lnRef idx="1">
+            <a:schemeClr val="accent1"/>
+          </a:lnRef>
+          <a:fillRef idx="3">
+            <a:schemeClr val="accent1"/>
+          </a:fillRef>
+          <a:effectRef idx="2">
+            <a:schemeClr val="accent1"/>
+          </a:effectRef>
+          <a:fontRef idx="minor">
+            <a:schemeClr val="lt1"/>
+          </a:fontRef>
+        </p:style>
+        <p:txBody>
+          <a:bodyPr rtlCol="0" anchor="ctr" wrap="none" lIns="64000" rIns="64000" tIns="25400" bIns="25400"/>
+          <a:lstStyle/>
+          <a:p>
+            <a:pPr algn="ctr"/>
+            <a:r>
+              <a:rPr sz="1300" b="0">
+                <a:solidFill>
+                  <a:srgbClr val="000000"/>
+                </a:solidFill>
+                <a:latin typeface="Calibri"/>
+              </a:rPr>
+              <a:t>Quên tập rỗng</a:t>
+            </a:r>
+          </a:p>
+        </p:txBody>
+      </p:sp>
+      <p:sp>
+        <p:nvSpPr>
+          <p:cNvPr id="43" name="Oval 42"/>
+          <p:cNvSpPr/>
+          <p:nvPr/>
+        </p:nvSpPr>
+        <p:spPr>
+          <a:xfrm>
+            <a:off x="6601995" y="4826713"/>
+            <a:ext cx="2227301" cy="823767"/>
+          </a:xfrm>
+          <a:prstGeom prst="ellipse">
+            <a:avLst/>
+          </a:prstGeom>
+          <a:solidFill>
+            <a:srgbClr val="FFF2CC"/>
+          </a:solidFill>
+          <a:ln w="31750">
+            <a:solidFill>
+              <a:srgbClr val="BF8F00"/>
+            </a:solidFill>
+          </a:ln>
+          <a:effectLst/>
+        </p:spPr>
+        <p:style>
+          <a:lnRef idx="1">
+            <a:schemeClr val="accent1"/>
+          </a:lnRef>
+          <a:fillRef idx="3">
+            <a:schemeClr val="accent1"/>
+          </a:fillRef>
+          <a:effectRef idx="2">
+            <a:schemeClr val="accent1"/>
+          </a:effectRef>
+          <a:fontRef idx="minor">
+            <a:schemeClr val="lt1"/>
+          </a:fontRef>
+        </p:style>
+        <p:txBody>
+          <a:bodyPr rtlCol="0" anchor="ctr" wrap="none" lIns="64000" rIns="64000" tIns="25400" bIns="25400"/>
+          <a:lstStyle/>
+          <a:p>
+            <a:pPr algn="ctr"/>
+            <a:r>
+              <a:rPr sz="1500" b="1">
+                <a:solidFill>
+                  <a:srgbClr val="000000"/>
+                </a:solidFill>
+                <a:latin typeface="Calibri"/>
+              </a:rPr>
+              <a:t>Sai lầm thường</a:t>
+            </a:r>
+          </a:p>
+          <a:p>
+            <a:pPr algn="ctr"/>
+            <a:r>
+              <a:rPr sz="1500" b="1">
+                <a:solidFill>
+                  <a:srgbClr val="000000"/>
+                </a:solidFill>
+                <a:latin typeface="Calibri"/>
+              </a:rPr>
+              <a:t>gặp</a:t>
+            </a:r>
+          </a:p>
+        </p:txBody>
+      </p:sp>
+      <p:sp>
+        <p:nvSpPr>
+          <p:cNvPr id="44" name="Oval 43"/>
+          <p:cNvSpPr/>
+          <p:nvPr/>
+        </p:nvSpPr>
+        <p:spPr>
+          <a:xfrm>
+            <a:off x="4941353" y="3484793"/>
+            <a:ext cx="2171828" cy="939972"/>
+          </a:xfrm>
+          <a:prstGeom prst="ellipse">
+            <a:avLst/>
+          </a:prstGeom>
+          <a:solidFill>
+            <a:srgbClr val="002060"/>
+          </a:solidFill>
+          <a:ln w="25400">
+            <a:solidFill>
+              <a:srgbClr val="000B1E"/>
+            </a:solidFill>
+          </a:ln>
+          <a:effectLst/>
+        </p:spPr>
+        <p:style>
+          <a:lnRef idx="1">
+            <a:schemeClr val="accent1"/>
+          </a:lnRef>
+          <a:fillRef idx="3">
+            <a:schemeClr val="accent1"/>
+          </a:fillRef>
+          <a:effectRef idx="2">
+            <a:schemeClr val="accent1"/>
+          </a:effectRef>
+          <a:fontRef idx="minor">
+            <a:schemeClr val="lt1"/>
+          </a:fontRef>
+        </p:style>
+        <p:txBody>
+          <a:bodyPr rtlCol="0" anchor="ctr" wrap="none" lIns="64000" rIns="64000" tIns="25400" bIns="25400"/>
+          <a:lstStyle/>
+          <a:p>
+            <a:pPr algn="ctr"/>
+            <a:r>
+              <a:rPr sz="1700" b="1">
+                <a:solidFill>
+                  <a:srgbClr val="FFFFFF"/>
+                </a:solidFill>
+                <a:latin typeface="Calibri"/>
+              </a:rPr>
+              <a:t>BÀI TẬP CUỐI</a:t>
+            </a:r>
+          </a:p>
+          <a:p>
+            <a:pPr algn="ctr"/>
+            <a:r>
+              <a:rPr sz="1700" b="1">
+                <a:solidFill>
+                  <a:srgbClr val="FFFFFF"/>
+                </a:solidFill>
+                <a:latin typeface="Calibri"/>
+              </a:rPr>
+              <a:t>CHƯƠNG I</a:t>
+            </a:r>
+          </a:p>
+        </p:txBody>
+      </p:sp>
     </p:spTree>
   </p:cSld>
   <p:clrMapOvr>
